--- a/docs/visitor_categories.pptx
+++ b/docs/visitor_categories.pptx
@@ -5483,7 +5483,7 @@
                           </a:solidFill>
                           <a:latin typeface="Yu Gothic UI"/>
                         </a:rPr>
-                        <a:t>—</a:t>
+                        <a:t>教室運営</a:t>
                       </a:r>
                     </a:p>
                   </a:txBody>

--- a/docs/visitor_categories.pptx
+++ b/docs/visitor_categories.pptx
@@ -3659,7 +3659,7 @@
                     <a:p>
                       <a:pPr algn="l"/>
                       <a:r>
-                        <a:rPr sz="1800" b="1">
+                        <a:rPr sz="1400" b="1">
                           <a:solidFill>
                             <a:srgbClr val="1A1A1A"/>
                           </a:solidFill>
@@ -3668,7 +3668,7 @@
                         <a:t>堀川 マサル</a:t>
                       </a:r>
                       <a:r>
-                        <a:rPr sz="1100">
+                        <a:rPr sz="1000">
                           <a:solidFill>
                             <a:srgbClr val="5C5348"/>
                           </a:solidFill>
@@ -4137,7 +4137,7 @@
                     <a:p>
                       <a:pPr algn="l"/>
                       <a:r>
-                        <a:rPr sz="1800" b="1">
+                        <a:rPr sz="1100" b="1">
                           <a:solidFill>
                             <a:srgbClr val="1A1A1A"/>
                           </a:solidFill>
@@ -4146,7 +4146,7 @@
                         <a:t>NGUYEN VAN LONG</a:t>
                       </a:r>
                       <a:r>
-                        <a:rPr sz="1100">
+                        <a:rPr sz="1000">
                           <a:solidFill>
                             <a:srgbClr val="5C5348"/>
                           </a:solidFill>
@@ -4207,7 +4207,7 @@
                     <a:p>
                       <a:pPr algn="l"/>
                       <a:r>
-                        <a:rPr sz="1800" b="1">
+                        <a:rPr sz="1400" b="1">
                           <a:solidFill>
                             <a:srgbClr val="1A1A1A"/>
                           </a:solidFill>
@@ -4216,7 +4216,7 @@
                         <a:t>高野 なおみ</a:t>
                       </a:r>
                       <a:r>
-                        <a:rPr sz="1100">
+                        <a:rPr sz="1000">
                           <a:solidFill>
                             <a:srgbClr val="5C5348"/>
                           </a:solidFill>
@@ -5233,7 +5233,7 @@
                     <a:p>
                       <a:pPr algn="l"/>
                       <a:r>
-                        <a:rPr sz="1800" b="1">
+                        <a:rPr sz="1400" b="1">
                           <a:solidFill>
                             <a:srgbClr val="1A1A1A"/>
                           </a:solidFill>
@@ -5242,7 +5242,7 @@
                         <a:t>澤口 奈緒美</a:t>
                       </a:r>
                       <a:r>
-                        <a:rPr sz="1100">
+                        <a:rPr sz="1000">
                           <a:solidFill>
                             <a:srgbClr val="5C5348"/>
                           </a:solidFill>
